--- a/AI_Based_Crop_Recommendation_Phase1.pptx
+++ b/AI_Based_Crop_Recommendation_Phase1.pptx
@@ -20705,7 +20705,7 @@
                 </a:solidFill>
                 <a:latin typeface="Segoe UI Semibold"/>
               </a:rPr>
-              <a:t>What Is Working Today (~40% Complete)</a:t>
+              <a:t>What Is Working Today (Phase-1 Baseline)</a:t>
             </a:r>
           </a:p>
         </p:txBody>
@@ -21553,7 +21553,7 @@
                 </a:solidFill>
                 <a:latin typeface="Segoe UI Semibold"/>
               </a:rPr>
-              <a:t>Overall Project Progress</a:t>
+              <a:t>Extension Modules Delivered</a:t>
             </a:r>
           </a:p>
         </p:txBody>
@@ -21613,7 +21613,7 @@
         <p:spPr>
           <a:xfrm>
             <a:off x="7589520" y="2148840"/>
-            <a:ext cx="1517904" cy="384048"/>
+            <a:ext cx="3415284" cy="384048"/>
           </a:xfrm>
           <a:prstGeom prst="roundRect">
             <a:avLst>
@@ -21687,7 +21687,7 @@
                 </a:solidFill>
                 <a:latin typeface="Segoe UI"/>
               </a:rPr>
-              <a:t>~40%</a:t>
+              <a:t>9 / 10</a:t>
             </a:r>
           </a:p>
         </p:txBody>
@@ -21729,7 +21729,7 @@
                 </a:solidFill>
                 <a:latin typeface="Segoe UI"/>
               </a:rPr>
-              <a:t>Baseline crop recommendation system verified end-to-end. Remaining modules are scoped as Future Scope.</a:t>
+              <a:t>Baseline crop recommendation system verified end-to-end. 9 of the 10 originally-planned extension modules (see next slide) are now implemented and tested — only Satellite/NDVI remains future scope.</a:t>
             </a:r>
           </a:p>
         </p:txBody>
@@ -21916,7 +21916,7 @@
                 </a:solidFill>
                 <a:latin typeface="Segoe UI"/>
               </a:rPr>
-              <a:t>•  Modules listed in Future Scope (not started)</a:t>
+              <a:t>•  Satellite/NDVI monitoring (no data provider connected)</a:t>
             </a:r>
           </a:p>
         </p:txBody>
@@ -26117,7 +26117,7 @@
                 </a:solidFill>
                 <a:latin typeface="Segoe UI Semibold"/>
               </a:rPr>
-              <a:t>FUTURE SCOPE / PLANNED EXTENSIONS</a:t>
+              <a:t>IMPLEMENTATION STATUS UPDATE</a:t>
             </a:r>
           </a:p>
         </p:txBody>
@@ -26201,7 +26201,7 @@
                 </a:solidFill>
                 <a:latin typeface="Segoe UI"/>
               </a:rPr>
-              <a:t>The architecture is extensible by design; the following are planned modules, not completed features.</a:t>
+              <a:t>The architecture was designed to be extensible — 9 of these 10 modules are now implemented and verified end-to-end (real trained ML models, published formulas, or rule-based logic on real farm data — never fabricated). Only Satellite/NDVI has no data provider connected and remains future scope; physical IoT hardware is also not connected (the real ingestion endpoint works with demo sensor data).</a:t>
             </a:r>
           </a:p>
         </p:txBody>
@@ -26291,7 +26291,7 @@
                 </a:solidFill>
                 <a:latin typeface="Segoe UI"/>
               </a:rPr>
-              <a:t>Leaf Disease Detection</a:t>
+              <a:t>✓ Leaf Disease Detection</a:t>
             </a:r>
           </a:p>
         </p:txBody>
@@ -26381,7 +26381,7 @@
                 </a:solidFill>
                 <a:latin typeface="Segoe UI"/>
               </a:rPr>
-              <a:t>Crop Market Price Intelligence</a:t>
+              <a:t>✓ Crop Market Price Intelligence</a:t>
             </a:r>
           </a:p>
         </p:txBody>
@@ -26471,7 +26471,7 @@
                 </a:solidFill>
                 <a:latin typeface="Segoe UI"/>
               </a:rPr>
-              <a:t>Fertilizer Recommendation</a:t>
+              <a:t>✓ Fertilizer Recommendation</a:t>
             </a:r>
           </a:p>
         </p:txBody>
@@ -26561,7 +26561,7 @@
                 </a:solidFill>
                 <a:latin typeface="Segoe UI"/>
               </a:rPr>
-              <a:t>Personalized Farmer Messages</a:t>
+              <a:t>✓ Personalized Farmer Messages</a:t>
             </a:r>
           </a:p>
         </p:txBody>
@@ -26651,7 +26651,7 @@
                 </a:solidFill>
                 <a:latin typeface="Segoe UI"/>
               </a:rPr>
-              <a:t>Yield Prediction</a:t>
+              <a:t>✓ Yield Prediction</a:t>
             </a:r>
           </a:p>
         </p:txBody>
@@ -26741,7 +26741,7 @@
                 </a:solidFill>
                 <a:latin typeface="Segoe UI"/>
               </a:rPr>
-              <a:t>Water Requirement Estimation</a:t>
+              <a:t>✓ Water Requirement Estimation</a:t>
             </a:r>
           </a:p>
         </p:txBody>
@@ -26831,7 +26831,7 @@
                 </a:solidFill>
                 <a:latin typeface="Segoe UI"/>
               </a:rPr>
-              <a:t>Risk Prediction</a:t>
+              <a:t>✓ Risk Prediction</a:t>
             </a:r>
           </a:p>
         </p:txBody>
@@ -26921,7 +26921,7 @@
                 </a:solidFill>
                 <a:latin typeface="Segoe UI"/>
               </a:rPr>
-              <a:t>Profit Intelligence</a:t>
+              <a:t>✓ Profit Intelligence</a:t>
             </a:r>
           </a:p>
         </p:txBody>
@@ -27011,7 +27011,7 @@
                 </a:solidFill>
                 <a:latin typeface="Segoe UI"/>
               </a:rPr>
-              <a:t>AI Agriculture Assistant</a:t>
+              <a:t>✓ AI Agriculture Assistant</a:t>
             </a:r>
           </a:p>
         </p:txBody>
@@ -27175,7 +27175,7 @@
                 </a:solidFill>
                 <a:latin typeface="Segoe UI Semibold"/>
               </a:rPr>
-              <a:t>PLANNED — NOT YET IMPLEMENTED</a:t>
+              <a:t>9 OF 10 MODULES IMPLEMENTED</a:t>
             </a:r>
           </a:p>
         </p:txBody>
@@ -28365,7 +28365,7 @@
                 </a:solidFill>
                 <a:latin typeface="Segoe UI"/>
               </a:rPr>
-              <a:t>Current 40% Build</a:t>
+              <a:t>Current Build Status</a:t>
             </a:r>
           </a:p>
         </p:txBody>
@@ -28671,7 +28671,7 @@
                 </a:solidFill>
                 <a:latin typeface="Segoe UI"/>
               </a:rPr>
-              <a:t>AgriAI's crop recommendation baseline is real, trained and verified end-to-end: a public benchmark dataset, four honestly-compared ML models, a 99.3% test-accuracy Random Forest as the active model, and SHAP-based explainability — with all remaining modules clearly scoped as future work.</a:t>
+              <a:t>AgriAI's crop recommendation baseline is real, trained and verified end-to-end: a public benchmark dataset, four honestly-compared ML models, a 99.3% test-accuracy Random Forest as the active model, and SHAP-based explainability. Since then, 9 of the 10 originally-planned extension modules — yield, profit, water, risk, disease detection, fertilizer, market price, notifications and the AI assistant — have also been implemented and verified end-to-end. Only satellite/NDVI monitoring remains future scope.</a:t>
             </a:r>
           </a:p>
         </p:txBody>
@@ -28801,7 +28801,7 @@
                 </a:solidFill>
                 <a:latin typeface="Segoe UI"/>
               </a:rPr>
-              <a:t>Full reference list: 20 literature-review papers (slides 7-10) + project documentation (docs/dataset.md, docs/ml-methodology.md, docs/architecture.md, docs/xai.md) + ml/crop_recommendation/train.py + models/metrics.json.</a:t>
+              <a:t>Full reference list: 20 literature-review papers (slides 7-10) + project documentation (docs/dataset.md, docs/ml-methodology.md, docs/architecture.md, docs/xai.md, docs/future-scope.md) + ml/crop_recommendation/train.py + models/metrics.json.</a:t>
             </a:r>
           </a:p>
         </p:txBody>
